--- a/6/6.Программирование_на_Python.pptx
+++ b/6/6.Программирование_на_Python.pptx
@@ -280,7 +280,7 @@
               <a:pPr>
                 <a:defRPr/>
               </a:pPr>
-              <a:t>07.10.2025</a:t>
+              <a:t>15.10.2025</a:t>
             </a:fld>
             <a:endParaRPr lang="ru-RU"/>
           </a:p>
@@ -499,7 +499,7 @@
               <a:pPr>
                 <a:defRPr/>
               </a:pPr>
-              <a:t>07.10.2025</a:t>
+              <a:t>15.10.2025</a:t>
             </a:fld>
             <a:endParaRPr lang="ru-RU"/>
           </a:p>
@@ -20449,13 +20449,6 @@
               </a:rPr>
               <a:t>Задача 4</a:t>
             </a:r>
-            <a:endParaRPr lang="ru-RU" altLang="ru-RU" sz="2000" dirty="0" smtClean="0">
-              <a:solidFill>
-                <a:srgbClr val="0077C2"/>
-              </a:solidFill>
-              <a:latin typeface="Segoe UI" panose="020B0502040204020203" pitchFamily="34" charset="0"/>
-              <a:cs typeface="Segoe UI" panose="020B0502040204020203" pitchFamily="34" charset="0"/>
-            </a:endParaRPr>
           </a:p>
           <a:p>
             <a:pPr lvl="0"/>
@@ -21084,8 +21077,8 @@
         </p:nvSpPr>
         <p:spPr>
           <a:xfrm>
-            <a:off x="336377" y="1386165"/>
-            <a:ext cx="11407948" cy="5109091"/>
+            <a:off x="363271" y="1297345"/>
+            <a:ext cx="11407948" cy="4708981"/>
           </a:xfrm>
           <a:prstGeom prst="rect">
             <a:avLst/>
@@ -21199,7 +21192,7 @@
               <a:t> в порядке убывания. </a:t>
             </a:r>
             <a:r>
-              <a:rPr lang="ru-RU" altLang="ru-RU" b="1" dirty="0">
+              <a:rPr lang="ru-RU" altLang="ru-RU" b="1" dirty="0" smtClean="0">
                 <a:solidFill>
                   <a:srgbClr val="0077C2"/>
                 </a:solidFill>
@@ -21209,7 +21202,7 @@
               <a:t>Запрещено использовать инструкцию </a:t>
             </a:r>
             <a:r>
-              <a:rPr lang="ru-RU" altLang="ru-RU" b="1" dirty="0" err="1">
+              <a:rPr lang="ru-RU" altLang="ru-RU" b="1" dirty="0" err="1" smtClean="0">
                 <a:solidFill>
                   <a:srgbClr val="0077C2"/>
                 </a:solidFill>
@@ -21219,7 +21212,7 @@
               <a:t>if</a:t>
             </a:r>
             <a:r>
-              <a:rPr lang="ru-RU" altLang="ru-RU" dirty="0">
+              <a:rPr lang="ru-RU" altLang="ru-RU" dirty="0" smtClean="0">
                 <a:solidFill>
                   <a:srgbClr val="0077C2"/>
                 </a:solidFill>
@@ -21490,11 +21483,18 @@
                 <a:latin typeface="Segoe UI" panose="020B0502040204020203" pitchFamily="34" charset="0"/>
                 <a:cs typeface="Segoe UI" panose="020B0502040204020203" pitchFamily="34" charset="0"/>
               </a:rPr>
-              <a:t>1 22 333 4444</a:t>
+              <a:t>1 22 333 </a:t>
             </a:r>
-          </a:p>
-          <a:p>
-            <a:pPr lvl="0"/>
+            <a:r>
+              <a:rPr lang="ru-RU" altLang="ru-RU" dirty="0" smtClean="0">
+                <a:solidFill>
+                  <a:srgbClr val="0077C2"/>
+                </a:solidFill>
+                <a:latin typeface="Segoe UI" panose="020B0502040204020203" pitchFamily="34" charset="0"/>
+                <a:cs typeface="Segoe UI" panose="020B0502040204020203" pitchFamily="34" charset="0"/>
+              </a:rPr>
+              <a:t>4444</a:t>
+            </a:r>
             <a:endParaRPr lang="ru-RU" altLang="ru-RU" dirty="0">
               <a:solidFill>
                 <a:srgbClr val="0077C2"/>
